--- a/gallery/pptx/fixtures/08-presets.pptx
+++ b/gallery/pptx/fixtures/08-presets.pptx
@@ -115,7 +115,7 @@
                 </a:solidFill>
                 <a:latin typeface="Calibri"/>
               </a:rPr>
-              <a:t>Preset geometries</a:t>
+              <a:t xml:space="preserve">Preset geometries</a:t>
             </a:r>
           </a:p>
         </p:txBody>
